--- a/UNIUBE-MD/Slides/03 - Expressoes Logicas.pptx
+++ b/UNIUBE-MD/Slides/03 - Expressoes Logicas.pptx
@@ -8150,21 +8150,8 @@
                   <a:schemeClr val="bg1"/>
                 </a:solidFill>
               </a:rPr>
-              <a:t>módulo 3 – expressões </a:t>
-            </a:r>
-            <a:r>
-              <a:rPr lang="pt-BR" dirty="0" err="1">
-                <a:solidFill>
-                  <a:schemeClr val="bg1"/>
-                </a:solidFill>
-              </a:rPr>
-              <a:t>lÓGICAS</a:t>
-            </a:r>
-            <a:endParaRPr lang="pt-BR" dirty="0">
-              <a:solidFill>
-                <a:schemeClr val="bg1"/>
-              </a:solidFill>
-            </a:endParaRPr>
+              <a:t>módulo 3 – expressões lógicas</a:t>
+            </a:r>
           </a:p>
         </p:txBody>
       </p:sp>
